--- a/report-generator/tests/report_generator/integration/references/reference_itdd-technical-debt.pptx
+++ b/report-generator/tests/report_generator/integration/references/reference_itdd-technical-debt.pptx
@@ -20926,7 +20926,7 @@
           <a:p>
             <a:r>
               <a:rPr lang="en-US" dirty="0" err="1"/>
-              <a:t>March 08, 2026</a:t>
+              <a:t>March 20, 2026</a:t>
             </a:r>
             <a:endParaRPr lang="en-US" dirty="0"/>
           </a:p>

--- a/report-generator/tests/report_generator/integration/references/reference_itdd-technical-debt.pptx
+++ b/report-generator/tests/report_generator/integration/references/reference_itdd-technical-debt.pptx
@@ -20926,7 +20926,7 @@
           <a:p>
             <a:r>
               <a:rPr lang="en-US" dirty="0" err="1"/>
-              <a:t>March 20, 2026</a:t>
+              <a:t>March 08, 2026</a:t>
             </a:r>
             <a:endParaRPr lang="en-US" dirty="0"/>
           </a:p>
